--- a/materials/week7/w7-slides.pptx
+++ b/materials/week7/w7-slides.pptx
@@ -24110,7 +24110,7 @@
         <p:spPr>
           <a:xfrm>
             <a:off x="822960" y="4401820"/>
-            <a:ext cx="10545775" cy="1029208"/>
+            <a:ext cx="10545775" cy="560324"/>
           </a:xfrm>
           <a:prstGeom prst="rect">
             <a:avLst/>
@@ -24133,7 +24133,7 @@
                 <a:ea typeface="Leelawadee UI"/>
                 <a:cs typeface="Leelawadee UI"/>
               </a:rPr>
-              <a:t>• 🚦 พิมพ์ 🟢 🟡 🔴 ในแชท + โพสต์ screenshot ทุก Checkpoint</a:t>
+              <a:t>• 🚦 พิมพ์ 🟢 🟡 🔴 ในแชท · ผ่าน Checkpoint แล้วพิมพ์บอก</a:t>
             </a:r>
           </a:p>
         </p:txBody>
